--- a/decks/HCLS-CIO-Adoption-Review.pptx
+++ b/decks/HCLS-CIO-Adoption-Review.pptx
@@ -19026,28 +19026,28 @@
         <a:sysClr val="window" lastClr="FFFFFF"/>
       </a:lt1>
       <a:dk2>
-        <a:srgbClr val="44546A"/>
+        <a:srgbClr val="232F3E"/>
       </a:dk2>
       <a:lt2>
         <a:srgbClr val="E7E6E6"/>
       </a:lt2>
       <a:accent1>
-        <a:srgbClr val="4472C4"/>
+        <a:srgbClr val="FF9900"/>
       </a:accent1>
       <a:accent2>
-        <a:srgbClr val="ED7D31"/>
+        <a:srgbClr val="232F3E"/>
       </a:accent2>
       <a:accent3>
-        <a:srgbClr val="A5A5A5"/>
+        <a:srgbClr val="01A88D"/>
       </a:accent3>
       <a:accent4>
-        <a:srgbClr val="FFC000"/>
+        <a:srgbClr val="8C4FFF"/>
       </a:accent4>
       <a:accent5>
-        <a:srgbClr val="5B9BD5"/>
+        <a:srgbClr val="DD344C"/>
       </a:accent5>
       <a:accent6>
-        <a:srgbClr val="70AD47"/>
+        <a:srgbClr val="ED7100"/>
       </a:accent6>
       <a:hlink>
         <a:srgbClr val="0563C1"/>
@@ -19058,7 +19058,7 @@
     </a:clrScheme>
     <a:fontScheme name="Office">
       <a:majorFont>
-        <a:latin typeface="Calibri Light" panose="020F0302020204030204"/>
+        <a:latin typeface="Amazon Ember" panose="020F0302020204030204"/>
         <a:ea typeface=""/>
         <a:cs typeface=""/>
         <a:font script="Jpan" typeface="游ゴシック Light"/>
@@ -19110,7 +19110,7 @@
         <a:font script="Tfng" typeface="Ebrima"/>
       </a:majorFont>
       <a:minorFont>
-        <a:latin typeface="Calibri" panose="020F0502020204030204"/>
+        <a:latin typeface="Amazon Ember" panose="020F0502020204030204"/>
         <a:ea typeface=""/>
         <a:cs typeface=""/>
         <a:font script="Jpan" typeface="游ゴシック"/>

--- a/decks/HCLS-CIO-Adoption-Review.pptx
+++ b/decks/HCLS-CIO-Adoption-Review.pptx
@@ -17,6 +17,8 @@
     <p:sldId id="265" r:id="rId11"/>
     <p:sldId id="266" r:id="rId12"/>
     <p:sldId id="267" r:id="rId13"/>
+    <p:sldId id="268" r:id="rId19"/>
+    <p:sldId id="269" r:id="rId20"/>
   </p:sldIdLst>
   <p:notesMasterIdLst>
     <p:notesMasterId r:id="rId14"/>
@@ -1873,6 +1875,10 @@
           </a:solidFill>
           <a:ln/>
         </p:spPr>
+        <p:txBody>
+          <a:bodyPr/>
+          <a:p/>
+        </p:txBody>
       </p:sp>
       <p:sp>
         <p:nvSpPr>
@@ -1893,6 +1899,10 @@
           </a:solidFill>
           <a:ln/>
         </p:spPr>
+        <p:txBody>
+          <a:bodyPr/>
+          <a:p/>
+        </p:txBody>
       </p:sp>
       <p:sp>
         <p:nvSpPr>
@@ -1913,6 +1923,10 @@
           </a:solidFill>
           <a:ln/>
         </p:spPr>
+        <p:txBody>
+          <a:bodyPr/>
+          <a:p/>
+        </p:txBody>
       </p:sp>
       <p:pic>
         <p:nvPicPr>
@@ -2104,6 +2118,10 @@
             <a:prstDash val="solid"/>
           </a:ln>
         </p:spPr>
+        <p:txBody>
+          <a:bodyPr/>
+          <a:p/>
+        </p:txBody>
       </p:sp>
       <p:sp>
         <p:nvSpPr>
@@ -2194,6 +2212,39 @@
               <a:t>8 governed agents · AWS-native · 21 CFR Part 11 / GxP · GVP/E2B · HIPAA · FDA AI guidance (Jan 2025) · NIST AI RMF</a:t>
             </a:r>
             <a:endParaRPr lang="en-US" sz="1200" dirty="0"/>
+          </a:p>
+        </p:txBody>
+      </p:sp>
+      <p:sp>
+        <p:nvSpPr>
+          <p:cNvPr id="12" name="TextBox 11"/>
+          <p:cNvSpPr txBox="1"/>
+          <p:nvPr/>
+        </p:nvSpPr>
+        <p:spPr>
+          <a:xfrm>
+            <a:off x="274320" y="6446520"/>
+            <a:ext cx="11643360" cy="365760"/>
+          </a:xfrm>
+          <a:prstGeom prst="rect">
+            <a:avLst/>
+          </a:prstGeom>
+          <a:noFill/>
+        </p:spPr>
+        <p:txBody>
+          <a:bodyPr wrap="square">
+            <a:spAutoFit/>
+          </a:bodyPr>
+          <a:lstStyle/>
+          <a:p>
+            <a:r>
+              <a:rPr sz="750">
+                <a:solidFill>
+                  <a:srgbClr val="B0B8C0"/>
+                </a:solidFill>
+              </a:rPr>
+              <a:t>Reference accelerator - not an AWS service or certification. Built on AWS; not AWS-affiliated/endorsed.</a:t>
+            </a:r>
           </a:p>
         </p:txBody>
       </p:sp>
@@ -2379,6 +2430,10 @@
             </a:outerShdw>
           </a:effectLst>
         </p:spPr>
+        <p:txBody>
+          <a:bodyPr/>
+          <a:p/>
+        </p:txBody>
       </p:sp>
       <p:sp>
         <p:nvSpPr>
@@ -2399,6 +2454,10 @@
           </a:solidFill>
           <a:ln/>
         </p:spPr>
+        <p:txBody>
+          <a:bodyPr/>
+          <a:p/>
+        </p:txBody>
       </p:sp>
       <p:pic>
         <p:nvPicPr>
@@ -2538,6 +2597,10 @@
             </a:outerShdw>
           </a:effectLst>
         </p:spPr>
+        <p:txBody>
+          <a:bodyPr/>
+          <a:p/>
+        </p:txBody>
       </p:sp>
       <p:sp>
         <p:nvSpPr>
@@ -2558,6 +2621,10 @@
           </a:solidFill>
           <a:ln/>
         </p:spPr>
+        <p:txBody>
+          <a:bodyPr/>
+          <a:p/>
+        </p:txBody>
       </p:sp>
       <p:pic>
         <p:nvPicPr>
@@ -2697,6 +2764,10 @@
             </a:outerShdw>
           </a:effectLst>
         </p:spPr>
+        <p:txBody>
+          <a:bodyPr/>
+          <a:p/>
+        </p:txBody>
       </p:sp>
       <p:sp>
         <p:nvSpPr>
@@ -2717,6 +2788,10 @@
           </a:solidFill>
           <a:ln/>
         </p:spPr>
+        <p:txBody>
+          <a:bodyPr/>
+          <a:p/>
+        </p:txBody>
       </p:sp>
       <p:pic>
         <p:nvPicPr>
@@ -2856,6 +2931,10 @@
             </a:outerShdw>
           </a:effectLst>
         </p:spPr>
+        <p:txBody>
+          <a:bodyPr/>
+          <a:p/>
+        </p:txBody>
       </p:sp>
       <p:sp>
         <p:nvSpPr>
@@ -2876,6 +2955,10 @@
           </a:solidFill>
           <a:ln/>
         </p:spPr>
+        <p:txBody>
+          <a:bodyPr/>
+          <a:p/>
+        </p:txBody>
       </p:sp>
       <p:pic>
         <p:nvPicPr>
@@ -3015,6 +3098,10 @@
             </a:outerShdw>
           </a:effectLst>
         </p:spPr>
+        <p:txBody>
+          <a:bodyPr/>
+          <a:p/>
+        </p:txBody>
       </p:sp>
       <p:sp>
         <p:nvSpPr>
@@ -3035,6 +3122,10 @@
           </a:solidFill>
           <a:ln/>
         </p:spPr>
+        <p:txBody>
+          <a:bodyPr/>
+          <a:p/>
+        </p:txBody>
       </p:sp>
       <p:pic>
         <p:nvPicPr>
@@ -3174,6 +3265,10 @@
             </a:outerShdw>
           </a:effectLst>
         </p:spPr>
+        <p:txBody>
+          <a:bodyPr/>
+          <a:p/>
+        </p:txBody>
       </p:sp>
       <p:sp>
         <p:nvSpPr>
@@ -3194,6 +3289,10 @@
           </a:solidFill>
           <a:ln/>
         </p:spPr>
+        <p:txBody>
+          <a:bodyPr/>
+          <a:p/>
+        </p:txBody>
       </p:sp>
       <p:pic>
         <p:nvPicPr>
@@ -3333,6 +3432,10 @@
             </a:outerShdw>
           </a:effectLst>
         </p:spPr>
+        <p:txBody>
+          <a:bodyPr/>
+          <a:p/>
+        </p:txBody>
       </p:sp>
       <p:sp>
         <p:nvSpPr>
@@ -3353,6 +3456,10 @@
           </a:solidFill>
           <a:ln/>
         </p:spPr>
+        <p:txBody>
+          <a:bodyPr/>
+          <a:p/>
+        </p:txBody>
       </p:sp>
       <p:pic>
         <p:nvPicPr>
@@ -3492,6 +3599,10 @@
             </a:outerShdw>
           </a:effectLst>
         </p:spPr>
+        <p:txBody>
+          <a:bodyPr/>
+          <a:p/>
+        </p:txBody>
       </p:sp>
       <p:sp>
         <p:nvSpPr>
@@ -3512,6 +3623,10 @@
           </a:solidFill>
           <a:ln/>
         </p:spPr>
+        <p:txBody>
+          <a:bodyPr/>
+          <a:p/>
+        </p:txBody>
       </p:sp>
       <p:pic>
         <p:nvPicPr>
@@ -3839,6 +3954,10 @@
             </a:outerShdw>
           </a:effectLst>
         </p:spPr>
+        <p:txBody>
+          <a:bodyPr/>
+          <a:p/>
+        </p:txBody>
       </p:sp>
       <p:sp>
         <p:nvSpPr>
@@ -3859,6 +3978,10 @@
           </a:solidFill>
           <a:ln/>
         </p:spPr>
+        <p:txBody>
+          <a:bodyPr/>
+          <a:p/>
+        </p:txBody>
       </p:sp>
       <p:sp>
         <p:nvSpPr>
@@ -4158,6 +4281,10 @@
           </a:solidFill>
           <a:ln/>
         </p:spPr>
+        <p:txBody>
+          <a:bodyPr/>
+          <a:p/>
+        </p:txBody>
       </p:sp>
       <p:sp>
         <p:nvSpPr>
@@ -4192,6 +4319,10 @@
             </a:outerShdw>
           </a:effectLst>
         </p:spPr>
+        <p:txBody>
+          <a:bodyPr/>
+          <a:p/>
+        </p:txBody>
       </p:sp>
       <p:sp>
         <p:nvSpPr>
@@ -4212,6 +4343,10 @@
           </a:solidFill>
           <a:ln/>
         </p:spPr>
+        <p:txBody>
+          <a:bodyPr/>
+          <a:p/>
+        </p:txBody>
       </p:sp>
       <p:sp>
         <p:nvSpPr>
@@ -4511,6 +4646,10 @@
           </a:solidFill>
           <a:ln/>
         </p:spPr>
+        <p:txBody>
+          <a:bodyPr/>
+          <a:p/>
+        </p:txBody>
       </p:sp>
       <p:sp>
         <p:nvSpPr>
@@ -4545,6 +4684,10 @@
             </a:outerShdw>
           </a:effectLst>
         </p:spPr>
+        <p:txBody>
+          <a:bodyPr/>
+          <a:p/>
+        </p:txBody>
       </p:sp>
       <p:sp>
         <p:nvSpPr>
@@ -4565,6 +4708,10 @@
           </a:solidFill>
           <a:ln/>
         </p:spPr>
+        <p:txBody>
+          <a:bodyPr/>
+          <a:p/>
+        </p:txBody>
       </p:sp>
       <p:sp>
         <p:nvSpPr>
@@ -4866,6 +5013,10 @@
           </a:solidFill>
           <a:ln/>
         </p:spPr>
+        <p:txBody>
+          <a:bodyPr/>
+          <a:p/>
+        </p:txBody>
       </p:sp>
       <p:sp>
         <p:nvSpPr>
@@ -4886,6 +5037,10 @@
           </a:solidFill>
           <a:ln/>
         </p:spPr>
+        <p:txBody>
+          <a:bodyPr/>
+          <a:p/>
+        </p:txBody>
       </p:sp>
       <p:pic>
         <p:nvPicPr>
@@ -5060,6 +5215,10 @@
           </a:solidFill>
           <a:ln/>
         </p:spPr>
+        <p:txBody>
+          <a:bodyPr/>
+          <a:p/>
+        </p:txBody>
       </p:sp>
       <p:sp>
         <p:nvSpPr>
@@ -5172,6 +5331,10 @@
             </a:outerShdw>
           </a:effectLst>
         </p:spPr>
+        <p:txBody>
+          <a:bodyPr/>
+          <a:p/>
+        </p:txBody>
       </p:sp>
       <p:sp>
         <p:nvSpPr>
@@ -5192,6 +5355,10 @@
           </a:solidFill>
           <a:ln/>
         </p:spPr>
+        <p:txBody>
+          <a:bodyPr/>
+          <a:p/>
+        </p:txBody>
       </p:sp>
       <p:pic>
         <p:nvPicPr>
@@ -5431,6 +5598,10 @@
             </a:outerShdw>
           </a:effectLst>
         </p:spPr>
+        <p:txBody>
+          <a:bodyPr/>
+          <a:p/>
+        </p:txBody>
       </p:sp>
       <p:sp>
         <p:nvSpPr>
@@ -5451,6 +5622,10 @@
           </a:solidFill>
           <a:ln/>
         </p:spPr>
+        <p:txBody>
+          <a:bodyPr/>
+          <a:p/>
+        </p:txBody>
       </p:sp>
       <p:pic>
         <p:nvPicPr>
@@ -5678,6 +5853,10 @@
           </a:solidFill>
           <a:ln/>
         </p:spPr>
+        <p:txBody>
+          <a:bodyPr/>
+          <a:p/>
+        </p:txBody>
       </p:sp>
       <p:sp>
         <p:nvSpPr>
@@ -5735,6 +5914,689 @@
               <a:t>Approve a funded Phase-1 pilot on Agents 01 / 02 / 03 / 08. It compresses an SI-led build with a governance spine your CISO and QA/regulatory leadership can stand behind — while you keep GxP / Part 11 accountability and prove the controls in production before expanding.</a:t>
             </a:r>
             <a:endParaRPr lang="en-US" sz="1500" dirty="0"/>
+          </a:p>
+        </p:txBody>
+      </p:sp>
+    </p:spTree>
+  </p:cSld>
+  <p:clrMapOvr>
+    <a:masterClrMapping/>
+  </p:clrMapOvr>
+</p:sld>
+</file>
+
+<file path=ppt/slides/slide13.xml><?xml version="1.0" encoding="utf-8"?>
+<p:sld xmlns:a="http://schemas.openxmlformats.org/drawingml/2006/main" xmlns:p="http://schemas.openxmlformats.org/presentationml/2006/main" xmlns:r="http://schemas.openxmlformats.org/officeDocument/2006/relationships">
+  <p:cSld>
+    <p:spTree>
+      <p:nvGrpSpPr>
+        <p:cNvPr id="1" name=""/>
+        <p:cNvGrpSpPr/>
+        <p:nvPr/>
+      </p:nvGrpSpPr>
+      <p:grpSpPr/>
+      <p:sp>
+        <p:nvSpPr>
+          <p:cNvPr id="2" name="Rectangle 1"/>
+          <p:cNvSpPr/>
+          <p:nvPr/>
+        </p:nvSpPr>
+        <p:spPr>
+          <a:xfrm>
+            <a:off x="0" y="0"/>
+            <a:ext cx="12192000" cy="6858000"/>
+          </a:xfrm>
+          <a:prstGeom prst="rect">
+            <a:avLst/>
+          </a:prstGeom>
+          <a:solidFill>
+            <a:srgbClr val="232F3E"/>
+          </a:solidFill>
+          <a:ln>
+            <a:noFill/>
+          </a:ln>
+          <a:effectLst/>
+        </p:spPr>
+        <p:style>
+          <a:lnRef idx="1">
+            <a:schemeClr val="accent1"/>
+          </a:lnRef>
+          <a:fillRef idx="3">
+            <a:schemeClr val="accent1"/>
+          </a:fillRef>
+          <a:effectRef idx="2">
+            <a:schemeClr val="accent1"/>
+          </a:effectRef>
+          <a:fontRef idx="minor">
+            <a:schemeClr val="lt1"/>
+          </a:fontRef>
+        </p:style>
+        <p:txBody>
+          <a:bodyPr rtlCol="0" anchor="ctr"/>
+          <a:lstStyle/>
+          <a:p>
+            <a:pPr algn="ctr"/>
+          </a:p>
+        </p:txBody>
+      </p:sp>
+      <p:sp>
+        <p:nvSpPr>
+          <p:cNvPr id="3" name="TextBox 2"/>
+          <p:cNvSpPr txBox="1"/>
+          <p:nvPr/>
+        </p:nvSpPr>
+        <p:spPr>
+          <a:xfrm>
+            <a:off x="457200" y="320040"/>
+            <a:ext cx="11155680" cy="914400"/>
+          </a:xfrm>
+          <a:prstGeom prst="rect">
+            <a:avLst/>
+          </a:prstGeom>
+          <a:noFill/>
+        </p:spPr>
+        <p:txBody>
+          <a:bodyPr wrap="square">
+            <a:spAutoFit/>
+          </a:bodyPr>
+          <a:lstStyle/>
+          <a:p>
+            <a:r>
+              <a:rPr sz="3000" b="1">
+                <a:solidFill>
+                  <a:srgbClr val="FFFFFF"/>
+                </a:solidFill>
+              </a:rPr>
+              <a:t>Built on AWS HCLS-native services</a:t>
+            </a:r>
+          </a:p>
+          <a:p>
+            <a:r>
+              <a:rPr sz="1300">
+                <a:solidFill>
+                  <a:srgbClr val="FF9900"/>
+                </a:solidFill>
+              </a:rPr>
+              <a:t>Why this pattern belongs on AWS specifically - managed, HIPAA-eligible building blocks, one governed gateway</a:t>
+            </a:r>
+          </a:p>
+        </p:txBody>
+      </p:sp>
+      <p:graphicFrame>
+        <p:nvGraphicFramePr>
+          <p:cNvPr id="4" name="Table 3"/>
+          <p:cNvGraphicFramePr>
+            <a:graphicFrameLocks noGrp="1"/>
+          </p:cNvGraphicFramePr>
+          <p:nvPr/>
+        </p:nvGraphicFramePr>
+        <p:xfrm>
+          <a:off x="457200" y="1600200"/>
+          <a:ext cx="11155680" cy="3200400"/>
+        </p:xfrm>
+        <a:graphic>
+          <a:graphicData uri="http://schemas.openxmlformats.org/drawingml/2006/table">
+            <a:tbl>
+              <a:tblPr firstRow="1" bandRow="1">
+                <a:tableStyleId>{5C22544A-7EE6-4342-B048-85BDC9FD1C3A}</a:tableStyleId>
+              </a:tblPr>
+              <a:tblGrid>
+                <a:gridCol w="2743200"/>
+                <a:gridCol w="5852160"/>
+                <a:gridCol w="2560320"/>
+              </a:tblGrid>
+              <a:tr h="533400">
+                <a:tc>
+                  <a:txBody>
+                    <a:bodyPr/>
+                    <a:lstStyle/>
+                    <a:p>
+                      <a:r>
+                        <a:rPr b="1" sz="1200">
+                          <a:solidFill>
+                            <a:srgbClr val="232F3E"/>
+                          </a:solidFill>
+                        </a:rPr>
+                        <a:t>Agent</a:t>
+                      </a:r>
+                    </a:p>
+                  </a:txBody>
+                  <a:tcPr>
+                    <a:solidFill>
+                      <a:srgbClr val="FF9900"/>
+                    </a:solidFill>
+                  </a:tcPr>
+                </a:tc>
+                <a:tc>
+                  <a:txBody>
+                    <a:bodyPr/>
+                    <a:lstStyle/>
+                    <a:p>
+                      <a:r>
+                        <a:rPr b="1" sz="1200">
+                          <a:solidFill>
+                            <a:srgbClr val="232F3E"/>
+                          </a:solidFill>
+                        </a:rPr>
+                        <a:t>AWS HCLS-native fit</a:t>
+                      </a:r>
+                    </a:p>
+                  </a:txBody>
+                  <a:tcPr>
+                    <a:solidFill>
+                      <a:srgbClr val="FF9900"/>
+                    </a:solidFill>
+                  </a:tcPr>
+                </a:tc>
+                <a:tc>
+                  <a:txBody>
+                    <a:bodyPr/>
+                    <a:lstStyle/>
+                    <a:p>
+                      <a:r>
+                        <a:rPr b="1" sz="1200">
+                          <a:solidFill>
+                            <a:srgbClr val="232F3E"/>
+                          </a:solidFill>
+                        </a:rPr>
+                        <a:t>Status</a:t>
+                      </a:r>
+                    </a:p>
+                  </a:txBody>
+                  <a:tcPr>
+                    <a:solidFill>
+                      <a:srgbClr val="FF9900"/>
+                    </a:solidFill>
+                  </a:tcPr>
+                </a:tc>
+              </a:tr>
+              <a:tr h="533400">
+                <a:tc>
+                  <a:txBody>
+                    <a:bodyPr/>
+                    <a:lstStyle/>
+                    <a:p>
+                      <a:r>
+                        <a:rPr sz="1050" b="0">
+                          <a:solidFill>
+                            <a:srgbClr val="FFFFFF"/>
+                          </a:solidFill>
+                        </a:rPr>
+                        <a:t>02  Pharmacovigilance / ICSR</a:t>
+                      </a:r>
+                    </a:p>
+                  </a:txBody>
+                  <a:tcPr>
+                    <a:solidFill>
+                      <a:srgbClr val="232F3E"/>
+                    </a:solidFill>
+                  </a:tcPr>
+                </a:tc>
+                <a:tc>
+                  <a:txBody>
+                    <a:bodyPr/>
+                    <a:lstStyle/>
+                    <a:p>
+                      <a:r>
+                        <a:rPr sz="1050" b="0">
+                          <a:solidFill>
+                            <a:srgbClr val="FFFFFF"/>
+                          </a:solidFill>
+                        </a:rPr>
+                        <a:t>Amazon Comprehend Medical - AE + PHI extraction from case narratives</a:t>
+                      </a:r>
+                    </a:p>
+                  </a:txBody>
+                  <a:tcPr>
+                    <a:solidFill>
+                      <a:srgbClr val="232F3E"/>
+                    </a:solidFill>
+                  </a:tcPr>
+                </a:tc>
+                <a:tc>
+                  <a:txBody>
+                    <a:bodyPr/>
+                    <a:lstStyle/>
+                    <a:p>
+                      <a:r>
+                        <a:rPr sz="1050" b="1">
+                          <a:solidFill>
+                            <a:srgbClr val="01A88D"/>
+                          </a:solidFill>
+                        </a:rPr>
+                        <a:t>LIVE pattern</a:t>
+                      </a:r>
+                    </a:p>
+                  </a:txBody>
+                  <a:tcPr>
+                    <a:solidFill>
+                      <a:srgbClr val="232F3E"/>
+                    </a:solidFill>
+                  </a:tcPr>
+                </a:tc>
+              </a:tr>
+              <a:tr h="533400">
+                <a:tc>
+                  <a:txBody>
+                    <a:bodyPr/>
+                    <a:lstStyle/>
+                    <a:p>
+                      <a:r>
+                        <a:rPr sz="1050" b="0">
+                          <a:solidFill>
+                            <a:srgbClr val="FFFFFF"/>
+                          </a:solidFill>
+                        </a:rPr>
+                        <a:t>04  Site &amp; Patient Matching</a:t>
+                      </a:r>
+                    </a:p>
+                  </a:txBody>
+                  <a:tcPr>
+                    <a:solidFill>
+                      <a:srgbClr val="232F3E"/>
+                    </a:solidFill>
+                  </a:tcPr>
+                </a:tc>
+                <a:tc>
+                  <a:txBody>
+                    <a:bodyPr/>
+                    <a:lstStyle/>
+                    <a:p>
+                      <a:r>
+                        <a:rPr sz="1050" b="0">
+                          <a:solidFill>
+                            <a:srgbClr val="FFFFFF"/>
+                          </a:solidFill>
+                        </a:rPr>
+                        <a:t>Amazon HealthLake (FHIR RWD cohorts) + HealthOmics</a:t>
+                      </a:r>
+                    </a:p>
+                  </a:txBody>
+                  <a:tcPr>
+                    <a:solidFill>
+                      <a:srgbClr val="232F3E"/>
+                    </a:solidFill>
+                  </a:tcPr>
+                </a:tc>
+                <a:tc>
+                  <a:txBody>
+                    <a:bodyPr/>
+                    <a:lstStyle/>
+                    <a:p>
+                      <a:r>
+                        <a:rPr sz="1050" b="0">
+                          <a:solidFill>
+                            <a:srgbClr val="FFFFFF"/>
+                          </a:solidFill>
+                        </a:rPr>
+                        <a:t>Roadmap</a:t>
+                      </a:r>
+                    </a:p>
+                  </a:txBody>
+                  <a:tcPr>
+                    <a:solidFill>
+                      <a:srgbClr val="232F3E"/>
+                    </a:solidFill>
+                  </a:tcPr>
+                </a:tc>
+              </a:tr>
+              <a:tr h="533400">
+                <a:tc>
+                  <a:txBody>
+                    <a:bodyPr/>
+                    <a:lstStyle/>
+                    <a:p>
+                      <a:r>
+                        <a:rPr sz="1050" b="0">
+                          <a:solidFill>
+                            <a:srgbClr val="FFFFFF"/>
+                          </a:solidFill>
+                        </a:rPr>
+                        <a:t>07  RWE / HEOR</a:t>
+                      </a:r>
+                    </a:p>
+                  </a:txBody>
+                  <a:tcPr>
+                    <a:solidFill>
+                      <a:srgbClr val="232F3E"/>
+                    </a:solidFill>
+                  </a:tcPr>
+                </a:tc>
+                <a:tc>
+                  <a:txBody>
+                    <a:bodyPr/>
+                    <a:lstStyle/>
+                    <a:p>
+                      <a:r>
+                        <a:rPr sz="1050" b="0">
+                          <a:solidFill>
+                            <a:srgbClr val="FFFFFF"/>
+                          </a:solidFill>
+                        </a:rPr>
+                        <a:t>Amazon HealthLake + HealthOmics (variant / genomic RWD)</a:t>
+                      </a:r>
+                    </a:p>
+                  </a:txBody>
+                  <a:tcPr>
+                    <a:solidFill>
+                      <a:srgbClr val="232F3E"/>
+                    </a:solidFill>
+                  </a:tcPr>
+                </a:tc>
+                <a:tc>
+                  <a:txBody>
+                    <a:bodyPr/>
+                    <a:lstStyle/>
+                    <a:p>
+                      <a:r>
+                        <a:rPr sz="1050" b="0">
+                          <a:solidFill>
+                            <a:srgbClr val="FFFFFF"/>
+                          </a:solidFill>
+                        </a:rPr>
+                        <a:t>Roadmap</a:t>
+                      </a:r>
+                    </a:p>
+                  </a:txBody>
+                  <a:tcPr>
+                    <a:solidFill>
+                      <a:srgbClr val="232F3E"/>
+                    </a:solidFill>
+                  </a:tcPr>
+                </a:tc>
+              </a:tr>
+              <a:tr h="533400">
+                <a:tc>
+                  <a:txBody>
+                    <a:bodyPr/>
+                    <a:lstStyle/>
+                    <a:p>
+                      <a:r>
+                        <a:rPr sz="1050" b="0">
+                          <a:solidFill>
+                            <a:srgbClr val="FFFFFF"/>
+                          </a:solidFill>
+                        </a:rPr>
+                        <a:t>03  Clinical Trial Ops / TMF</a:t>
+                      </a:r>
+                    </a:p>
+                  </a:txBody>
+                  <a:tcPr>
+                    <a:solidFill>
+                      <a:srgbClr val="232F3E"/>
+                    </a:solidFill>
+                  </a:tcPr>
+                </a:tc>
+                <a:tc>
+                  <a:txBody>
+                    <a:bodyPr/>
+                    <a:lstStyle/>
+                    <a:p>
+                      <a:r>
+                        <a:rPr sz="1050" b="0">
+                          <a:solidFill>
+                            <a:srgbClr val="FFFFFF"/>
+                          </a:solidFill>
+                        </a:rPr>
+                        <a:t>Comprehend Medical + Amazon Textract (TMF doc understanding)</a:t>
+                      </a:r>
+                    </a:p>
+                  </a:txBody>
+                  <a:tcPr>
+                    <a:solidFill>
+                      <a:srgbClr val="232F3E"/>
+                    </a:solidFill>
+                  </a:tcPr>
+                </a:tc>
+                <a:tc>
+                  <a:txBody>
+                    <a:bodyPr/>
+                    <a:lstStyle/>
+                    <a:p>
+                      <a:r>
+                        <a:rPr sz="1050" b="0">
+                          <a:solidFill>
+                            <a:srgbClr val="FFFFFF"/>
+                          </a:solidFill>
+                        </a:rPr>
+                        <a:t>Roadmap</a:t>
+                      </a:r>
+                    </a:p>
+                  </a:txBody>
+                  <a:tcPr>
+                    <a:solidFill>
+                      <a:srgbClr val="232F3E"/>
+                    </a:solidFill>
+                  </a:tcPr>
+                </a:tc>
+              </a:tr>
+              <a:tr h="533400">
+                <a:tc>
+                  <a:txBody>
+                    <a:bodyPr/>
+                    <a:lstStyle/>
+                    <a:p>
+                      <a:r>
+                        <a:rPr sz="1050" b="0">
+                          <a:solidFill>
+                            <a:srgbClr val="FFFFFF"/>
+                          </a:solidFill>
+                        </a:rPr>
+                        <a:t>All agents</a:t>
+                      </a:r>
+                    </a:p>
+                  </a:txBody>
+                  <a:tcPr>
+                    <a:solidFill>
+                      <a:srgbClr val="232F3E"/>
+                    </a:solidFill>
+                  </a:tcPr>
+                </a:tc>
+                <a:tc>
+                  <a:txBody>
+                    <a:bodyPr/>
+                    <a:lstStyle/>
+                    <a:p>
+                      <a:r>
+                        <a:rPr sz="1050" b="0">
+                          <a:solidFill>
+                            <a:srgbClr val="FFFFFF"/>
+                          </a:solidFill>
+                        </a:rPr>
+                        <a:t>Amazon Bedrock + Guardrails - Knowledge Bases (grounding) - Textract (intake)</a:t>
+                      </a:r>
+                    </a:p>
+                  </a:txBody>
+                  <a:tcPr>
+                    <a:solidFill>
+                      <a:srgbClr val="232F3E"/>
+                    </a:solidFill>
+                  </a:tcPr>
+                </a:tc>
+                <a:tc>
+                  <a:txBody>
+                    <a:bodyPr/>
+                    <a:lstStyle/>
+                    <a:p>
+                      <a:r>
+                        <a:rPr sz="1050" b="0">
+                          <a:solidFill>
+                            <a:srgbClr val="FFFFFF"/>
+                          </a:solidFill>
+                        </a:rPr>
+                        <a:t>Fit</a:t>
+                      </a:r>
+                    </a:p>
+                  </a:txBody>
+                  <a:tcPr>
+                    <a:solidFill>
+                      <a:srgbClr val="232F3E"/>
+                    </a:solidFill>
+                  </a:tcPr>
+                </a:tc>
+              </a:tr>
+            </a:tbl>
+          </a:graphicData>
+        </a:graphic>
+      </p:graphicFrame>
+      <p:sp>
+        <p:nvSpPr>
+          <p:cNvPr id="5" name="TextBox 4"/>
+          <p:cNvSpPr txBox="1"/>
+          <p:nvPr/>
+        </p:nvSpPr>
+        <p:spPr>
+          <a:xfrm>
+            <a:off x="457200" y="6172200"/>
+            <a:ext cx="11155680" cy="548640"/>
+          </a:xfrm>
+          <a:prstGeom prst="rect">
+            <a:avLst/>
+          </a:prstGeom>
+          <a:noFill/>
+        </p:spPr>
+        <p:txBody>
+          <a:bodyPr wrap="square">
+            <a:spAutoFit/>
+          </a:bodyPr>
+          <a:lstStyle/>
+          <a:p>
+            <a:r>
+              <a:rPr sz="850">
+                <a:solidFill>
+                  <a:srgbClr val="B0B8C0"/>
+                </a:solidFill>
+              </a:rPr>
+              <a:t>Architectural fit / roadmap except where marked LIVE. Comprehend Medical is wired (opt-in, fail-closed) in the healthcare payer/provider suite. HIPAA-eligible services reached via regional API / PrivateLink under the customer AWS BAA.</a:t>
+            </a:r>
+          </a:p>
+        </p:txBody>
+      </p:sp>
+    </p:spTree>
+  </p:cSld>
+  <p:clrMapOvr>
+    <a:masterClrMapping/>
+  </p:clrMapOvr>
+</p:sld>
+</file>
+
+<file path=ppt/slides/slide14.xml><?xml version="1.0" encoding="utf-8"?>
+<p:sld xmlns:a="http://schemas.openxmlformats.org/drawingml/2006/main" xmlns:p="http://schemas.openxmlformats.org/presentationml/2006/main" xmlns:r="http://schemas.openxmlformats.org/officeDocument/2006/relationships">
+  <p:cSld>
+    <p:spTree>
+      <p:nvGrpSpPr>
+        <p:cNvPr id="1" name=""/>
+        <p:cNvGrpSpPr/>
+        <p:nvPr/>
+      </p:nvGrpSpPr>
+      <p:grpSpPr/>
+      <p:sp>
+        <p:nvSpPr>
+          <p:cNvPr id="2" name="Rectangle 1"/>
+          <p:cNvSpPr/>
+          <p:nvPr/>
+        </p:nvSpPr>
+        <p:spPr>
+          <a:xfrm>
+            <a:off x="0" y="0"/>
+            <a:ext cx="12192000" cy="6858000"/>
+          </a:xfrm>
+          <a:prstGeom prst="rect">
+            <a:avLst/>
+          </a:prstGeom>
+          <a:solidFill>
+            <a:srgbClr val="232F3E"/>
+          </a:solidFill>
+          <a:ln>
+            <a:noFill/>
+          </a:ln>
+          <a:effectLst/>
+        </p:spPr>
+        <p:style>
+          <a:lnRef idx="1">
+            <a:schemeClr val="accent1"/>
+          </a:lnRef>
+          <a:fillRef idx="3">
+            <a:schemeClr val="accent1"/>
+          </a:fillRef>
+          <a:effectRef idx="2">
+            <a:schemeClr val="accent1"/>
+          </a:effectRef>
+          <a:fontRef idx="minor">
+            <a:schemeClr val="lt1"/>
+          </a:fontRef>
+        </p:style>
+        <p:txBody>
+          <a:bodyPr rtlCol="0" anchor="ctr"/>
+          <a:lstStyle/>
+          <a:p>
+            <a:pPr algn="ctr"/>
+          </a:p>
+        </p:txBody>
+      </p:sp>
+      <p:sp>
+        <p:nvSpPr>
+          <p:cNvPr id="3" name="TextBox 2"/>
+          <p:cNvSpPr txBox="1"/>
+          <p:nvPr/>
+        </p:nvSpPr>
+        <p:spPr>
+          <a:xfrm>
+            <a:off x="548640" y="640080"/>
+            <a:ext cx="11094720" cy="914400"/>
+          </a:xfrm>
+          <a:prstGeom prst="rect">
+            <a:avLst/>
+          </a:prstGeom>
+          <a:noFill/>
+        </p:spPr>
+        <p:txBody>
+          <a:bodyPr wrap="none">
+            <a:spAutoFit/>
+          </a:bodyPr>
+          <a:lstStyle/>
+          <a:p>
+            <a:r>
+              <a:rPr sz="3000" b="1">
+                <a:solidFill>
+                  <a:srgbClr val="FF9900"/>
+                </a:solidFill>
+              </a:rPr>
+              <a:t>Disclaimer &amp; shared responsibility</a:t>
+            </a:r>
+          </a:p>
+        </p:txBody>
+      </p:sp>
+      <p:sp>
+        <p:nvSpPr>
+          <p:cNvPr id="4" name="TextBox 3"/>
+          <p:cNvSpPr txBox="1"/>
+          <p:nvPr/>
+        </p:nvSpPr>
+        <p:spPr>
+          <a:xfrm>
+            <a:off x="640080" y="1828800"/>
+            <a:ext cx="10911840" cy="3108960"/>
+          </a:xfrm>
+          <a:prstGeom prst="rect">
+            <a:avLst/>
+          </a:prstGeom>
+          <a:noFill/>
+        </p:spPr>
+        <p:txBody>
+          <a:bodyPr wrap="square">
+            <a:spAutoFit/>
+          </a:bodyPr>
+          <a:lstStyle/>
+          <a:p>
+            <a:r>
+              <a:rPr sz="1600">
+                <a:solidFill>
+                  <a:srgbClr val="FFFFFF"/>
+                </a:solidFill>
+              </a:rPr>
+              <a:t>Reference accelerator - not an AWS service, not AWS-supported software, not a compliance certification, and not production-ready for regulated data without customer-specific engineering, testing, authorization, and operational ownership. Built on AWS; not affiliated with or endorsed by Amazon Web Services.</a:t>
+            </a:r>
           </a:p>
         </p:txBody>
       </p:sp>
@@ -5876,6 +6738,10 @@
             </a:outerShdw>
           </a:effectLst>
         </p:spPr>
+        <p:txBody>
+          <a:bodyPr/>
+          <a:p/>
+        </p:txBody>
       </p:sp>
       <p:sp>
         <p:nvSpPr>
@@ -5896,6 +6762,10 @@
           </a:solidFill>
           <a:ln/>
         </p:spPr>
+        <p:txBody>
+          <a:bodyPr/>
+          <a:p/>
+        </p:txBody>
       </p:sp>
       <p:pic>
         <p:nvPicPr>
@@ -6030,6 +6900,10 @@
             </a:outerShdw>
           </a:effectLst>
         </p:spPr>
+        <p:txBody>
+          <a:bodyPr/>
+          <a:p/>
+        </p:txBody>
       </p:sp>
       <p:sp>
         <p:nvSpPr>
@@ -6050,6 +6924,10 @@
           </a:solidFill>
           <a:ln/>
         </p:spPr>
+        <p:txBody>
+          <a:bodyPr/>
+          <a:p/>
+        </p:txBody>
       </p:sp>
       <p:pic>
         <p:nvPicPr>
@@ -6184,6 +7062,10 @@
             </a:outerShdw>
           </a:effectLst>
         </p:spPr>
+        <p:txBody>
+          <a:bodyPr/>
+          <a:p/>
+        </p:txBody>
       </p:sp>
       <p:sp>
         <p:nvSpPr>
@@ -6204,6 +7086,10 @@
           </a:solidFill>
           <a:ln/>
         </p:spPr>
+        <p:txBody>
+          <a:bodyPr/>
+          <a:p/>
+        </p:txBody>
       </p:sp>
       <p:pic>
         <p:nvPicPr>
@@ -6331,6 +7217,10 @@
           </a:solidFill>
           <a:ln/>
         </p:spPr>
+        <p:txBody>
+          <a:bodyPr/>
+          <a:p/>
+        </p:txBody>
       </p:sp>
       <p:sp>
         <p:nvSpPr>
@@ -6567,6 +7457,10 @@
             </a:outerShdw>
           </a:effectLst>
         </p:spPr>
+        <p:txBody>
+          <a:bodyPr/>
+          <a:p/>
+        </p:txBody>
       </p:sp>
       <p:sp>
         <p:nvSpPr>
@@ -6587,6 +7481,10 @@
           </a:solidFill>
           <a:ln/>
         </p:spPr>
+        <p:txBody>
+          <a:bodyPr/>
+          <a:p/>
+        </p:txBody>
       </p:sp>
       <p:sp>
         <p:nvSpPr>
@@ -6722,6 +7620,10 @@
             </a:outerShdw>
           </a:effectLst>
         </p:spPr>
+        <p:txBody>
+          <a:bodyPr/>
+          <a:p/>
+        </p:txBody>
       </p:sp>
       <p:sp>
         <p:nvSpPr>
@@ -6742,6 +7644,10 @@
           </a:solidFill>
           <a:ln/>
         </p:spPr>
+        <p:txBody>
+          <a:bodyPr/>
+          <a:p/>
+        </p:txBody>
       </p:sp>
       <p:sp>
         <p:nvSpPr>
@@ -6877,6 +7783,10 @@
             </a:outerShdw>
           </a:effectLst>
         </p:spPr>
+        <p:txBody>
+          <a:bodyPr/>
+          <a:p/>
+        </p:txBody>
       </p:sp>
       <p:sp>
         <p:nvSpPr>
@@ -6897,6 +7807,10 @@
           </a:solidFill>
           <a:ln/>
         </p:spPr>
+        <p:txBody>
+          <a:bodyPr/>
+          <a:p/>
+        </p:txBody>
       </p:sp>
       <p:sp>
         <p:nvSpPr>
@@ -7025,6 +7939,10 @@
             <a:prstDash val="solid"/>
           </a:ln>
         </p:spPr>
+        <p:txBody>
+          <a:bodyPr/>
+          <a:p/>
+        </p:txBody>
       </p:sp>
       <p:sp>
         <p:nvSpPr>
@@ -7045,6 +7963,10 @@
           </a:solidFill>
           <a:ln/>
         </p:spPr>
+        <p:txBody>
+          <a:bodyPr/>
+          <a:p/>
+        </p:txBody>
       </p:sp>
       <p:sp>
         <p:nvSpPr>
@@ -7219,6 +8141,10 @@
             </a:outerShdw>
           </a:effectLst>
         </p:spPr>
+        <p:txBody>
+          <a:bodyPr/>
+          <a:p/>
+        </p:txBody>
       </p:sp>
       <p:sp>
         <p:nvSpPr>
@@ -7239,6 +8165,10 @@
           </a:solidFill>
           <a:ln/>
         </p:spPr>
+        <p:txBody>
+          <a:bodyPr/>
+          <a:p/>
+        </p:txBody>
       </p:sp>
       <p:pic>
         <p:nvPicPr>
@@ -7423,6 +8353,10 @@
             <a:prstDash val="solid"/>
           </a:ln>
         </p:spPr>
+        <p:txBody>
+          <a:bodyPr/>
+          <a:p/>
+        </p:txBody>
       </p:sp>
       <p:sp>
         <p:nvSpPr>
@@ -7443,6 +8377,10 @@
           </a:solidFill>
           <a:ln/>
         </p:spPr>
+        <p:txBody>
+          <a:bodyPr/>
+          <a:p/>
+        </p:txBody>
       </p:sp>
       <p:pic>
         <p:nvPicPr>
@@ -7861,6 +8799,10 @@
             </a:outerShdw>
           </a:effectLst>
         </p:spPr>
+        <p:txBody>
+          <a:bodyPr/>
+          <a:p/>
+        </p:txBody>
       </p:sp>
       <p:sp>
         <p:nvSpPr>
@@ -7881,6 +8823,10 @@
           </a:solidFill>
           <a:ln/>
         </p:spPr>
+        <p:txBody>
+          <a:bodyPr/>
+          <a:p/>
+        </p:txBody>
       </p:sp>
       <p:pic>
         <p:nvPicPr>
@@ -8020,6 +8966,10 @@
             </a:outerShdw>
           </a:effectLst>
         </p:spPr>
+        <p:txBody>
+          <a:bodyPr/>
+          <a:p/>
+        </p:txBody>
       </p:sp>
       <p:sp>
         <p:nvSpPr>
@@ -8040,6 +8990,10 @@
           </a:solidFill>
           <a:ln/>
         </p:spPr>
+        <p:txBody>
+          <a:bodyPr/>
+          <a:p/>
+        </p:txBody>
       </p:sp>
       <p:pic>
         <p:nvPicPr>
@@ -8179,6 +9133,10 @@
             </a:outerShdw>
           </a:effectLst>
         </p:spPr>
+        <p:txBody>
+          <a:bodyPr/>
+          <a:p/>
+        </p:txBody>
       </p:sp>
       <p:sp>
         <p:nvSpPr>
@@ -8199,6 +9157,10 @@
           </a:solidFill>
           <a:ln/>
         </p:spPr>
+        <p:txBody>
+          <a:bodyPr/>
+          <a:p/>
+        </p:txBody>
       </p:sp>
       <p:pic>
         <p:nvPicPr>
@@ -8338,6 +9300,10 @@
             </a:outerShdw>
           </a:effectLst>
         </p:spPr>
+        <p:txBody>
+          <a:bodyPr/>
+          <a:p/>
+        </p:txBody>
       </p:sp>
       <p:sp>
         <p:nvSpPr>
@@ -8358,6 +9324,10 @@
           </a:solidFill>
           <a:ln/>
         </p:spPr>
+        <p:txBody>
+          <a:bodyPr/>
+          <a:p/>
+        </p:txBody>
       </p:sp>
       <p:pic>
         <p:nvPicPr>
@@ -8497,6 +9467,10 @@
             </a:outerShdw>
           </a:effectLst>
         </p:spPr>
+        <p:txBody>
+          <a:bodyPr/>
+          <a:p/>
+        </p:txBody>
       </p:sp>
       <p:sp>
         <p:nvSpPr>
@@ -8517,6 +9491,10 @@
           </a:solidFill>
           <a:ln/>
         </p:spPr>
+        <p:txBody>
+          <a:bodyPr/>
+          <a:p/>
+        </p:txBody>
       </p:sp>
       <p:pic>
         <p:nvPicPr>
@@ -8656,6 +9634,10 @@
             </a:outerShdw>
           </a:effectLst>
         </p:spPr>
+        <p:txBody>
+          <a:bodyPr/>
+          <a:p/>
+        </p:txBody>
       </p:sp>
       <p:sp>
         <p:nvSpPr>
@@ -8676,6 +9658,10 @@
           </a:solidFill>
           <a:ln/>
         </p:spPr>
+        <p:txBody>
+          <a:bodyPr/>
+          <a:p/>
+        </p:txBody>
       </p:sp>
       <p:pic>
         <p:nvPicPr>
@@ -8803,6 +9789,10 @@
           </a:solidFill>
           <a:ln/>
         </p:spPr>
+        <p:txBody>
+          <a:bodyPr/>
+          <a:p/>
+        </p:txBody>
       </p:sp>
       <p:sp>
         <p:nvSpPr>
@@ -8823,6 +9813,10 @@
           </a:solidFill>
           <a:ln/>
         </p:spPr>
+        <p:txBody>
+          <a:bodyPr/>
+          <a:p/>
+        </p:txBody>
       </p:sp>
       <p:pic>
         <p:nvPicPr>
@@ -9167,6 +10161,10 @@
             </a:outerShdw>
           </a:effectLst>
         </p:spPr>
+        <p:txBody>
+          <a:bodyPr/>
+          <a:p/>
+        </p:txBody>
       </p:sp>
       <p:sp>
         <p:nvSpPr>
@@ -9189,6 +10187,10 @@
           </a:solidFill>
           <a:ln/>
         </p:spPr>
+        <p:txBody>
+          <a:bodyPr/>
+          <a:p/>
+        </p:txBody>
       </p:sp>
       <p:sp>
         <p:nvSpPr>
@@ -9343,6 +10345,10 @@
             </a:outerShdw>
           </a:effectLst>
         </p:spPr>
+        <p:txBody>
+          <a:bodyPr/>
+          <a:p/>
+        </p:txBody>
       </p:sp>
       <p:sp>
         <p:nvSpPr>
@@ -9365,6 +10371,10 @@
           </a:solidFill>
           <a:ln/>
         </p:spPr>
+        <p:txBody>
+          <a:bodyPr/>
+          <a:p/>
+        </p:txBody>
       </p:sp>
       <p:sp>
         <p:nvSpPr>
@@ -9519,6 +10529,10 @@
             </a:outerShdw>
           </a:effectLst>
         </p:spPr>
+        <p:txBody>
+          <a:bodyPr/>
+          <a:p/>
+        </p:txBody>
       </p:sp>
       <p:sp>
         <p:nvSpPr>
@@ -9541,6 +10555,10 @@
           </a:solidFill>
           <a:ln/>
         </p:spPr>
+        <p:txBody>
+          <a:bodyPr/>
+          <a:p/>
+        </p:txBody>
       </p:sp>
       <p:sp>
         <p:nvSpPr>
@@ -9695,6 +10713,10 @@
             </a:outerShdw>
           </a:effectLst>
         </p:spPr>
+        <p:txBody>
+          <a:bodyPr/>
+          <a:p/>
+        </p:txBody>
       </p:sp>
       <p:sp>
         <p:nvSpPr>
@@ -9717,6 +10739,10 @@
           </a:solidFill>
           <a:ln/>
         </p:spPr>
+        <p:txBody>
+          <a:bodyPr/>
+          <a:p/>
+        </p:txBody>
       </p:sp>
       <p:sp>
         <p:nvSpPr>
@@ -9871,6 +10897,10 @@
             </a:outerShdw>
           </a:effectLst>
         </p:spPr>
+        <p:txBody>
+          <a:bodyPr/>
+          <a:p/>
+        </p:txBody>
       </p:sp>
       <p:sp>
         <p:nvSpPr>
@@ -9893,6 +10923,10 @@
           </a:solidFill>
           <a:ln/>
         </p:spPr>
+        <p:txBody>
+          <a:bodyPr/>
+          <a:p/>
+        </p:txBody>
       </p:sp>
       <p:sp>
         <p:nvSpPr>
@@ -10047,6 +11081,10 @@
             </a:outerShdw>
           </a:effectLst>
         </p:spPr>
+        <p:txBody>
+          <a:bodyPr/>
+          <a:p/>
+        </p:txBody>
       </p:sp>
       <p:sp>
         <p:nvSpPr>
@@ -10069,6 +11107,10 @@
           </a:solidFill>
           <a:ln/>
         </p:spPr>
+        <p:txBody>
+          <a:bodyPr/>
+          <a:p/>
+        </p:txBody>
       </p:sp>
       <p:sp>
         <p:nvSpPr>
@@ -10223,6 +11265,10 @@
             </a:outerShdw>
           </a:effectLst>
         </p:spPr>
+        <p:txBody>
+          <a:bodyPr/>
+          <a:p/>
+        </p:txBody>
       </p:sp>
       <p:sp>
         <p:nvSpPr>
@@ -10245,6 +11291,10 @@
           </a:solidFill>
           <a:ln/>
         </p:spPr>
+        <p:txBody>
+          <a:bodyPr/>
+          <a:p/>
+        </p:txBody>
       </p:sp>
       <p:sp>
         <p:nvSpPr>
@@ -10399,6 +11449,10 @@
             </a:outerShdw>
           </a:effectLst>
         </p:spPr>
+        <p:txBody>
+          <a:bodyPr/>
+          <a:p/>
+        </p:txBody>
       </p:sp>
       <p:sp>
         <p:nvSpPr>
@@ -10421,6 +11475,10 @@
           </a:solidFill>
           <a:ln/>
         </p:spPr>
+        <p:txBody>
+          <a:bodyPr/>
+          <a:p/>
+        </p:txBody>
       </p:sp>
       <p:sp>
         <p:nvSpPr>
@@ -10763,6 +11821,10 @@
             </a:outerShdw>
           </a:effectLst>
         </p:spPr>
+        <p:txBody>
+          <a:bodyPr/>
+          <a:p/>
+        </p:txBody>
       </p:sp>
       <p:sp>
         <p:nvSpPr>
@@ -10783,6 +11845,10 @@
           </a:solidFill>
           <a:ln/>
         </p:spPr>
+        <p:txBody>
+          <a:bodyPr/>
+          <a:p/>
+        </p:txBody>
       </p:sp>
       <p:pic>
         <p:nvPicPr>
@@ -10922,6 +11988,10 @@
             </a:outerShdw>
           </a:effectLst>
         </p:spPr>
+        <p:txBody>
+          <a:bodyPr/>
+          <a:p/>
+        </p:txBody>
       </p:sp>
       <p:sp>
         <p:nvSpPr>
@@ -10942,6 +12012,10 @@
           </a:solidFill>
           <a:ln/>
         </p:spPr>
+        <p:txBody>
+          <a:bodyPr/>
+          <a:p/>
+        </p:txBody>
       </p:sp>
       <p:pic>
         <p:nvPicPr>
@@ -11081,6 +12155,10 @@
             </a:outerShdw>
           </a:effectLst>
         </p:spPr>
+        <p:txBody>
+          <a:bodyPr/>
+          <a:p/>
+        </p:txBody>
       </p:sp>
       <p:sp>
         <p:nvSpPr>
@@ -11101,6 +12179,10 @@
           </a:solidFill>
           <a:ln/>
         </p:spPr>
+        <p:txBody>
+          <a:bodyPr/>
+          <a:p/>
+        </p:txBody>
       </p:sp>
       <p:pic>
         <p:nvPicPr>
@@ -11240,6 +12322,10 @@
             </a:outerShdw>
           </a:effectLst>
         </p:spPr>
+        <p:txBody>
+          <a:bodyPr/>
+          <a:p/>
+        </p:txBody>
       </p:sp>
       <p:sp>
         <p:nvSpPr>
@@ -11260,6 +12346,10 @@
           </a:solidFill>
           <a:ln/>
         </p:spPr>
+        <p:txBody>
+          <a:bodyPr/>
+          <a:p/>
+        </p:txBody>
       </p:sp>
       <p:pic>
         <p:nvPicPr>
@@ -11399,6 +12489,10 @@
             </a:outerShdw>
           </a:effectLst>
         </p:spPr>
+        <p:txBody>
+          <a:bodyPr/>
+          <a:p/>
+        </p:txBody>
       </p:sp>
       <p:sp>
         <p:nvSpPr>
@@ -11419,6 +12513,10 @@
           </a:solidFill>
           <a:ln/>
         </p:spPr>
+        <p:txBody>
+          <a:bodyPr/>
+          <a:p/>
+        </p:txBody>
       </p:sp>
       <p:pic>
         <p:nvPicPr>
@@ -11558,6 +12656,10 @@
             </a:outerShdw>
           </a:effectLst>
         </p:spPr>
+        <p:txBody>
+          <a:bodyPr/>
+          <a:p/>
+        </p:txBody>
       </p:sp>
       <p:sp>
         <p:nvSpPr>
@@ -11578,6 +12680,10 @@
           </a:solidFill>
           <a:ln/>
         </p:spPr>
+        <p:txBody>
+          <a:bodyPr/>
+          <a:p/>
+        </p:txBody>
       </p:sp>
       <p:pic>
         <p:nvPicPr>
@@ -11717,6 +12823,10 @@
             </a:outerShdw>
           </a:effectLst>
         </p:spPr>
+        <p:txBody>
+          <a:bodyPr/>
+          <a:p/>
+        </p:txBody>
       </p:sp>
       <p:sp>
         <p:nvSpPr>
@@ -11737,6 +12847,10 @@
           </a:solidFill>
           <a:ln/>
         </p:spPr>
+        <p:txBody>
+          <a:bodyPr/>
+          <a:p/>
+        </p:txBody>
       </p:sp>
       <p:pic>
         <p:nvPicPr>
@@ -11876,6 +12990,10 @@
             </a:outerShdw>
           </a:effectLst>
         </p:spPr>
+        <p:txBody>
+          <a:bodyPr/>
+          <a:p/>
+        </p:txBody>
       </p:sp>
       <p:sp>
         <p:nvSpPr>
@@ -11896,6 +13014,10 @@
           </a:solidFill>
           <a:ln/>
         </p:spPr>
+        <p:txBody>
+          <a:bodyPr/>
+          <a:p/>
+        </p:txBody>
       </p:sp>
       <p:pic>
         <p:nvPicPr>
@@ -12248,6 +13370,10 @@
           </a:solidFill>
           <a:ln/>
         </p:spPr>
+        <p:txBody>
+          <a:bodyPr/>
+          <a:p/>
+        </p:txBody>
       </p:sp>
       <p:sp>
         <p:nvSpPr>
@@ -12307,6 +13433,10 @@
           </a:solidFill>
           <a:ln/>
         </p:spPr>
+        <p:txBody>
+          <a:bodyPr/>
+          <a:p/>
+        </p:txBody>
       </p:sp>
       <p:sp>
         <p:nvSpPr>
@@ -12366,6 +13496,10 @@
           </a:solidFill>
           <a:ln/>
         </p:spPr>
+        <p:txBody>
+          <a:bodyPr/>
+          <a:p/>
+        </p:txBody>
       </p:sp>
       <p:sp>
         <p:nvSpPr>
@@ -13919,6 +15053,10 @@
             </a:outerShdw>
           </a:effectLst>
         </p:spPr>
+        <p:txBody>
+          <a:bodyPr/>
+          <a:p/>
+        </p:txBody>
       </p:sp>
       <p:sp>
         <p:nvSpPr>
@@ -13939,6 +15077,10 @@
           </a:solidFill>
           <a:ln/>
         </p:spPr>
+        <p:txBody>
+          <a:bodyPr/>
+          <a:p/>
+        </p:txBody>
       </p:sp>
       <p:pic>
         <p:nvPicPr>
@@ -14078,6 +15220,10 @@
             </a:outerShdw>
           </a:effectLst>
         </p:spPr>
+        <p:txBody>
+          <a:bodyPr/>
+          <a:p/>
+        </p:txBody>
       </p:sp>
       <p:sp>
         <p:nvSpPr>
@@ -14098,6 +15244,10 @@
           </a:solidFill>
           <a:ln/>
         </p:spPr>
+        <p:txBody>
+          <a:bodyPr/>
+          <a:p/>
+        </p:txBody>
       </p:sp>
       <p:pic>
         <p:nvPicPr>
@@ -14237,6 +15387,10 @@
             </a:outerShdw>
           </a:effectLst>
         </p:spPr>
+        <p:txBody>
+          <a:bodyPr/>
+          <a:p/>
+        </p:txBody>
       </p:sp>
       <p:sp>
         <p:nvSpPr>
@@ -14257,6 +15411,10 @@
           </a:solidFill>
           <a:ln/>
         </p:spPr>
+        <p:txBody>
+          <a:bodyPr/>
+          <a:p/>
+        </p:txBody>
       </p:sp>
       <p:pic>
         <p:nvPicPr>
@@ -14570,6 +15728,10 @@
           </a:solidFill>
           <a:ln/>
         </p:spPr>
+        <p:txBody>
+          <a:bodyPr/>
+          <a:p/>
+        </p:txBody>
       </p:sp>
       <p:sp>
         <p:nvSpPr>
@@ -14629,6 +15791,10 @@
           </a:solidFill>
           <a:ln/>
         </p:spPr>
+        <p:txBody>
+          <a:bodyPr/>
+          <a:p/>
+        </p:txBody>
       </p:sp>
       <p:sp>
         <p:nvSpPr>
@@ -14688,6 +15854,10 @@
           </a:solidFill>
           <a:ln/>
         </p:spPr>
+        <p:txBody>
+          <a:bodyPr/>
+          <a:p/>
+        </p:txBody>
       </p:sp>
       <p:sp>
         <p:nvSpPr>
@@ -16241,6 +17411,10 @@
             </a:outerShdw>
           </a:effectLst>
         </p:spPr>
+        <p:txBody>
+          <a:bodyPr/>
+          <a:p/>
+        </p:txBody>
       </p:sp>
       <p:sp>
         <p:nvSpPr>
@@ -16261,6 +17435,10 @@
           </a:solidFill>
           <a:ln/>
         </p:spPr>
+        <p:txBody>
+          <a:bodyPr/>
+          <a:p/>
+        </p:txBody>
       </p:sp>
       <p:pic>
         <p:nvPicPr>
@@ -16400,6 +17578,10 @@
             </a:outerShdw>
           </a:effectLst>
         </p:spPr>
+        <p:txBody>
+          <a:bodyPr/>
+          <a:p/>
+        </p:txBody>
       </p:sp>
       <p:sp>
         <p:nvSpPr>
@@ -16420,6 +17602,10 @@
           </a:solidFill>
           <a:ln/>
         </p:spPr>
+        <p:txBody>
+          <a:bodyPr/>
+          <a:p/>
+        </p:txBody>
       </p:sp>
       <p:pic>
         <p:nvPicPr>
@@ -16559,6 +17745,10 @@
             </a:outerShdw>
           </a:effectLst>
         </p:spPr>
+        <p:txBody>
+          <a:bodyPr/>
+          <a:p/>
+        </p:txBody>
       </p:sp>
       <p:sp>
         <p:nvSpPr>
@@ -16579,6 +17769,10 @@
           </a:solidFill>
           <a:ln/>
         </p:spPr>
+        <p:txBody>
+          <a:bodyPr/>
+          <a:p/>
+        </p:txBody>
       </p:sp>
       <p:pic>
         <p:nvPicPr>
@@ -16892,6 +18086,10 @@
           </a:solidFill>
           <a:ln/>
         </p:spPr>
+        <p:txBody>
+          <a:bodyPr/>
+          <a:p/>
+        </p:txBody>
       </p:sp>
       <p:sp>
         <p:nvSpPr>
@@ -16951,6 +18149,10 @@
           </a:solidFill>
           <a:ln/>
         </p:spPr>
+        <p:txBody>
+          <a:bodyPr/>
+          <a:p/>
+        </p:txBody>
       </p:sp>
       <p:sp>
         <p:nvSpPr>
@@ -17010,6 +18212,10 @@
           </a:solidFill>
           <a:ln/>
         </p:spPr>
+        <p:txBody>
+          <a:bodyPr/>
+          <a:p/>
+        </p:txBody>
       </p:sp>
       <p:sp>
         <p:nvSpPr>
@@ -18563,6 +19769,10 @@
             </a:outerShdw>
           </a:effectLst>
         </p:spPr>
+        <p:txBody>
+          <a:bodyPr/>
+          <a:p/>
+        </p:txBody>
       </p:sp>
       <p:sp>
         <p:nvSpPr>
@@ -18583,6 +19793,10 @@
           </a:solidFill>
           <a:ln/>
         </p:spPr>
+        <p:txBody>
+          <a:bodyPr/>
+          <a:p/>
+        </p:txBody>
       </p:sp>
       <p:pic>
         <p:nvPicPr>
@@ -18722,6 +19936,10 @@
             </a:outerShdw>
           </a:effectLst>
         </p:spPr>
+        <p:txBody>
+          <a:bodyPr/>
+          <a:p/>
+        </p:txBody>
       </p:sp>
       <p:sp>
         <p:nvSpPr>
@@ -18742,6 +19960,10 @@
           </a:solidFill>
           <a:ln/>
         </p:spPr>
+        <p:txBody>
+          <a:bodyPr/>
+          <a:p/>
+        </p:txBody>
       </p:sp>
       <p:pic>
         <p:nvPicPr>
@@ -18881,6 +20103,10 @@
             </a:outerShdw>
           </a:effectLst>
         </p:spPr>
+        <p:txBody>
+          <a:bodyPr/>
+          <a:p/>
+        </p:txBody>
       </p:sp>
       <p:sp>
         <p:nvSpPr>
@@ -18901,6 +20127,10 @@
           </a:solidFill>
           <a:ln/>
         </p:spPr>
+        <p:txBody>
+          <a:bodyPr/>
+          <a:p/>
+        </p:txBody>
       </p:sp>
       <p:pic>
         <p:nvPicPr>
